--- a/Physical_AI_Workshop.pptx
+++ b/Physical_AI_Workshop.pptx
@@ -5,22 +5,22 @@
     <p:sldMasterId id="2147483648" r:id="rId1"/>
   </p:sldMasterIdLst>
   <p:sldIdLst>
-    <p:sldId id="256" r:id="rId7"/>
-    <p:sldId id="257" r:id="rId8"/>
-    <p:sldId id="258" r:id="rId9"/>
-    <p:sldId id="259" r:id="rId10"/>
-    <p:sldId id="260" r:id="rId11"/>
-    <p:sldId id="261" r:id="rId12"/>
-    <p:sldId id="262" r:id="rId13"/>
-    <p:sldId id="263" r:id="rId14"/>
-    <p:sldId id="264" r:id="rId15"/>
-    <p:sldId id="265" r:id="rId16"/>
-    <p:sldId id="266" r:id="rId17"/>
-    <p:sldId id="267" r:id="rId18"/>
-    <p:sldId id="268" r:id="rId19"/>
-    <p:sldId id="269" r:id="rId20"/>
+    <p:sldId id="256" r:id="rId2"/>
+    <p:sldId id="257" r:id="rId3"/>
+    <p:sldId id="258" r:id="rId4"/>
+    <p:sldId id="259" r:id="rId5"/>
+    <p:sldId id="260" r:id="rId6"/>
+    <p:sldId id="261" r:id="rId7"/>
+    <p:sldId id="262" r:id="rId8"/>
+    <p:sldId id="263" r:id="rId9"/>
+    <p:sldId id="264" r:id="rId10"/>
+    <p:sldId id="265" r:id="rId11"/>
+    <p:sldId id="266" r:id="rId12"/>
+    <p:sldId id="267" r:id="rId13"/>
+    <p:sldId id="268" r:id="rId14"/>
+    <p:sldId id="269" r:id="rId15"/>
   </p:sldIdLst>
-  <p:sldSz cx="12191695" cy="6858000" type="screen4x3"/>
+  <p:sldSz cx="12192000" cy="6858000"/>
   <p:notesSz cx="6858000" cy="9144000"/>
   <p:defaultTextStyle>
     <a:defPPr>
@@ -117,6 +117,22 @@
       </a:defRPr>
     </a:lvl9pPr>
   </p:defaultTextStyle>
+  <p:extLst>
+    <p:ext uri="{EFAFB233-063F-42B5-8137-9DF3F51BA10A}">
+      <p15:sldGuideLst xmlns:p15="http://schemas.microsoft.com/office/powerpoint/2012/main">
+        <p15:guide id="1" orient="horz" pos="2160">
+          <p15:clr>
+            <a:srgbClr val="A4A3A4"/>
+          </p15:clr>
+        </p15:guide>
+        <p15:guide id="2" pos="2880">
+          <p15:clr>
+            <a:srgbClr val="A4A3A4"/>
+          </p15:clr>
+        </p15:guide>
+      </p15:sldGuideLst>
+    </p:ext>
+  </p:extLst>
 </p:presentation>
 </file>
 
@@ -158,10 +174,9 @@
           <a:lstStyle/>
           <a:p>
             <a:r>
-              <a:rPr lang="en-US" smtClean="0"/>
+              <a:rPr lang="en-US"/>
               <a:t>Click to edit Master title style</a:t>
             </a:r>
-            <a:endParaRPr lang="en-US"/>
           </a:p>
         </p:txBody>
       </p:sp>
@@ -277,10 +292,9 @@
           </a:lstStyle>
           <a:p>
             <a:r>
-              <a:rPr lang="en-US" smtClean="0"/>
+              <a:rPr lang="en-US"/>
               <a:t>Click to edit Master subtitle style</a:t>
             </a:r>
-            <a:endParaRPr lang="en-US"/>
           </a:p>
         </p:txBody>
       </p:sp>
@@ -301,7 +315,7 @@
           <a:p>
             <a:fld id="{5BCAD085-E8A6-8845-BD4E-CB4CCA059FC4}" type="datetimeFigureOut">
               <a:rPr lang="en-US" smtClean="0"/>
-              <a:t>1/27/13</a:t>
+              <a:t>4/7/26</a:t>
             </a:fld>
             <a:endParaRPr lang="en-US"/>
           </a:p>
@@ -395,10 +409,9 @@
           <a:lstStyle/>
           <a:p>
             <a:r>
-              <a:rPr lang="en-US" smtClean="0"/>
+              <a:rPr lang="en-US"/>
               <a:t>Click to edit Master title style</a:t>
             </a:r>
-            <a:endParaRPr lang="en-US"/>
           </a:p>
         </p:txBody>
       </p:sp>
@@ -419,38 +432,37 @@
           <a:p>
             <a:pPr lvl="0"/>
             <a:r>
-              <a:rPr lang="en-US" smtClean="0"/>
+              <a:rPr lang="en-US"/>
               <a:t>Click to edit Master text styles</a:t>
             </a:r>
           </a:p>
           <a:p>
             <a:pPr lvl="1"/>
             <a:r>
-              <a:rPr lang="en-US" smtClean="0"/>
+              <a:rPr lang="en-US"/>
               <a:t>Second level</a:t>
             </a:r>
           </a:p>
           <a:p>
             <a:pPr lvl="2"/>
             <a:r>
-              <a:rPr lang="en-US" smtClean="0"/>
+              <a:rPr lang="en-US"/>
               <a:t>Third level</a:t>
             </a:r>
           </a:p>
           <a:p>
             <a:pPr lvl="3"/>
             <a:r>
-              <a:rPr lang="en-US" smtClean="0"/>
+              <a:rPr lang="en-US"/>
               <a:t>Fourth level</a:t>
             </a:r>
           </a:p>
           <a:p>
             <a:pPr lvl="4"/>
             <a:r>
-              <a:rPr lang="en-US" smtClean="0"/>
+              <a:rPr lang="en-US"/>
               <a:t>Fifth level</a:t>
             </a:r>
-            <a:endParaRPr lang="en-US"/>
           </a:p>
         </p:txBody>
       </p:sp>
@@ -471,7 +483,7 @@
           <a:p>
             <a:fld id="{5BCAD085-E8A6-8845-BD4E-CB4CCA059FC4}" type="datetimeFigureOut">
               <a:rPr lang="en-US" smtClean="0"/>
-              <a:t>1/27/13</a:t>
+              <a:t>4/7/26</a:t>
             </a:fld>
             <a:endParaRPr lang="en-US"/>
           </a:p>
@@ -570,10 +582,9 @@
           <a:lstStyle/>
           <a:p>
             <a:r>
-              <a:rPr lang="en-US" smtClean="0"/>
+              <a:rPr lang="en-US"/>
               <a:t>Click to edit Master title style</a:t>
             </a:r>
-            <a:endParaRPr lang="en-US"/>
           </a:p>
         </p:txBody>
       </p:sp>
@@ -599,38 +610,37 @@
           <a:p>
             <a:pPr lvl="0"/>
             <a:r>
-              <a:rPr lang="en-US" smtClean="0"/>
+              <a:rPr lang="en-US"/>
               <a:t>Click to edit Master text styles</a:t>
             </a:r>
           </a:p>
           <a:p>
             <a:pPr lvl="1"/>
             <a:r>
-              <a:rPr lang="en-US" smtClean="0"/>
+              <a:rPr lang="en-US"/>
               <a:t>Second level</a:t>
             </a:r>
           </a:p>
           <a:p>
             <a:pPr lvl="2"/>
             <a:r>
-              <a:rPr lang="en-US" smtClean="0"/>
+              <a:rPr lang="en-US"/>
               <a:t>Third level</a:t>
             </a:r>
           </a:p>
           <a:p>
             <a:pPr lvl="3"/>
             <a:r>
-              <a:rPr lang="en-US" smtClean="0"/>
+              <a:rPr lang="en-US"/>
               <a:t>Fourth level</a:t>
             </a:r>
           </a:p>
           <a:p>
             <a:pPr lvl="4"/>
             <a:r>
-              <a:rPr lang="en-US" smtClean="0"/>
+              <a:rPr lang="en-US"/>
               <a:t>Fifth level</a:t>
             </a:r>
-            <a:endParaRPr lang="en-US"/>
           </a:p>
         </p:txBody>
       </p:sp>
@@ -651,7 +661,7 @@
           <a:p>
             <a:fld id="{5BCAD085-E8A6-8845-BD4E-CB4CCA059FC4}" type="datetimeFigureOut">
               <a:rPr lang="en-US" smtClean="0"/>
-              <a:t>1/27/13</a:t>
+              <a:t>4/7/26</a:t>
             </a:fld>
             <a:endParaRPr lang="en-US"/>
           </a:p>
@@ -745,10 +755,9 @@
           <a:lstStyle/>
           <a:p>
             <a:r>
-              <a:rPr lang="en-US" smtClean="0"/>
+              <a:rPr lang="en-US"/>
               <a:t>Click to edit Master title style</a:t>
             </a:r>
-            <a:endParaRPr lang="en-US"/>
           </a:p>
         </p:txBody>
       </p:sp>
@@ -769,38 +778,37 @@
           <a:p>
             <a:pPr lvl="0"/>
             <a:r>
-              <a:rPr lang="en-US" smtClean="0"/>
+              <a:rPr lang="en-US"/>
               <a:t>Click to edit Master text styles</a:t>
             </a:r>
           </a:p>
           <a:p>
             <a:pPr lvl="1"/>
             <a:r>
-              <a:rPr lang="en-US" smtClean="0"/>
+              <a:rPr lang="en-US"/>
               <a:t>Second level</a:t>
             </a:r>
           </a:p>
           <a:p>
             <a:pPr lvl="2"/>
             <a:r>
-              <a:rPr lang="en-US" smtClean="0"/>
+              <a:rPr lang="en-US"/>
               <a:t>Third level</a:t>
             </a:r>
           </a:p>
           <a:p>
             <a:pPr lvl="3"/>
             <a:r>
-              <a:rPr lang="en-US" smtClean="0"/>
+              <a:rPr lang="en-US"/>
               <a:t>Fourth level</a:t>
             </a:r>
           </a:p>
           <a:p>
             <a:pPr lvl="4"/>
             <a:r>
-              <a:rPr lang="en-US" smtClean="0"/>
+              <a:rPr lang="en-US"/>
               <a:t>Fifth level</a:t>
             </a:r>
-            <a:endParaRPr lang="en-US"/>
           </a:p>
         </p:txBody>
       </p:sp>
@@ -821,7 +829,7 @@
           <a:p>
             <a:fld id="{5BCAD085-E8A6-8845-BD4E-CB4CCA059FC4}" type="datetimeFigureOut">
               <a:rPr lang="en-US" smtClean="0"/>
-              <a:t>1/27/13</a:t>
+              <a:t>4/7/26</a:t>
             </a:fld>
             <a:endParaRPr lang="en-US"/>
           </a:p>
@@ -924,10 +932,9 @@
           </a:lstStyle>
           <a:p>
             <a:r>
-              <a:rPr lang="en-US" smtClean="0"/>
+              <a:rPr lang="en-US"/>
               <a:t>Click to edit Master title style</a:t>
             </a:r>
-            <a:endParaRPr lang="en-US"/>
           </a:p>
         </p:txBody>
       </p:sp>
@@ -1044,7 +1051,7 @@
           <a:p>
             <a:pPr lvl="0"/>
             <a:r>
-              <a:rPr lang="en-US" smtClean="0"/>
+              <a:rPr lang="en-US"/>
               <a:t>Click to edit Master text styles</a:t>
             </a:r>
           </a:p>
@@ -1067,7 +1074,7 @@
           <a:p>
             <a:fld id="{5BCAD085-E8A6-8845-BD4E-CB4CCA059FC4}" type="datetimeFigureOut">
               <a:rPr lang="en-US" smtClean="0"/>
-              <a:t>1/27/13</a:t>
+              <a:t>4/7/26</a:t>
             </a:fld>
             <a:endParaRPr lang="en-US"/>
           </a:p>
@@ -1161,10 +1168,9 @@
           <a:lstStyle/>
           <a:p>
             <a:r>
-              <a:rPr lang="en-US" smtClean="0"/>
+              <a:rPr lang="en-US"/>
               <a:t>Click to edit Master title style</a:t>
             </a:r>
-            <a:endParaRPr lang="en-US"/>
           </a:p>
         </p:txBody>
       </p:sp>
@@ -1218,38 +1224,37 @@
           <a:p>
             <a:pPr lvl="0"/>
             <a:r>
-              <a:rPr lang="en-US" smtClean="0"/>
+              <a:rPr lang="en-US"/>
               <a:t>Click to edit Master text styles</a:t>
             </a:r>
           </a:p>
           <a:p>
             <a:pPr lvl="1"/>
             <a:r>
-              <a:rPr lang="en-US" smtClean="0"/>
+              <a:rPr lang="en-US"/>
               <a:t>Second level</a:t>
             </a:r>
           </a:p>
           <a:p>
             <a:pPr lvl="2"/>
             <a:r>
-              <a:rPr lang="en-US" smtClean="0"/>
+              <a:rPr lang="en-US"/>
               <a:t>Third level</a:t>
             </a:r>
           </a:p>
           <a:p>
             <a:pPr lvl="3"/>
             <a:r>
-              <a:rPr lang="en-US" smtClean="0"/>
+              <a:rPr lang="en-US"/>
               <a:t>Fourth level</a:t>
             </a:r>
           </a:p>
           <a:p>
             <a:pPr lvl="4"/>
             <a:r>
-              <a:rPr lang="en-US" smtClean="0"/>
+              <a:rPr lang="en-US"/>
               <a:t>Fifth level</a:t>
             </a:r>
-            <a:endParaRPr lang="en-US"/>
           </a:p>
         </p:txBody>
       </p:sp>
@@ -1303,38 +1308,37 @@
           <a:p>
             <a:pPr lvl="0"/>
             <a:r>
-              <a:rPr lang="en-US" smtClean="0"/>
+              <a:rPr lang="en-US"/>
               <a:t>Click to edit Master text styles</a:t>
             </a:r>
           </a:p>
           <a:p>
             <a:pPr lvl="1"/>
             <a:r>
-              <a:rPr lang="en-US" smtClean="0"/>
+              <a:rPr lang="en-US"/>
               <a:t>Second level</a:t>
             </a:r>
           </a:p>
           <a:p>
             <a:pPr lvl="2"/>
             <a:r>
-              <a:rPr lang="en-US" smtClean="0"/>
+              <a:rPr lang="en-US"/>
               <a:t>Third level</a:t>
             </a:r>
           </a:p>
           <a:p>
             <a:pPr lvl="3"/>
             <a:r>
-              <a:rPr lang="en-US" smtClean="0"/>
+              <a:rPr lang="en-US"/>
               <a:t>Fourth level</a:t>
             </a:r>
           </a:p>
           <a:p>
             <a:pPr lvl="4"/>
             <a:r>
-              <a:rPr lang="en-US" smtClean="0"/>
+              <a:rPr lang="en-US"/>
               <a:t>Fifth level</a:t>
             </a:r>
-            <a:endParaRPr lang="en-US"/>
           </a:p>
         </p:txBody>
       </p:sp>
@@ -1355,7 +1359,7 @@
           <a:p>
             <a:fld id="{5BCAD085-E8A6-8845-BD4E-CB4CCA059FC4}" type="datetimeFigureOut">
               <a:rPr lang="en-US" smtClean="0"/>
-              <a:t>1/27/13</a:t>
+              <a:t>4/7/26</a:t>
             </a:fld>
             <a:endParaRPr lang="en-US"/>
           </a:p>
@@ -1453,10 +1457,9 @@
           </a:lstStyle>
           <a:p>
             <a:r>
-              <a:rPr lang="en-US" smtClean="0"/>
+              <a:rPr lang="en-US"/>
               <a:t>Click to edit Master title style</a:t>
             </a:r>
-            <a:endParaRPr lang="en-US"/>
           </a:p>
         </p:txBody>
       </p:sp>
@@ -1519,7 +1522,7 @@
           <a:p>
             <a:pPr lvl="0"/>
             <a:r>
-              <a:rPr lang="en-US" smtClean="0"/>
+              <a:rPr lang="en-US"/>
               <a:t>Click to edit Master text styles</a:t>
             </a:r>
           </a:p>
@@ -1575,38 +1578,37 @@
           <a:p>
             <a:pPr lvl="0"/>
             <a:r>
-              <a:rPr lang="en-US" smtClean="0"/>
+              <a:rPr lang="en-US"/>
               <a:t>Click to edit Master text styles</a:t>
             </a:r>
           </a:p>
           <a:p>
             <a:pPr lvl="1"/>
             <a:r>
-              <a:rPr lang="en-US" smtClean="0"/>
+              <a:rPr lang="en-US"/>
               <a:t>Second level</a:t>
             </a:r>
           </a:p>
           <a:p>
             <a:pPr lvl="2"/>
             <a:r>
-              <a:rPr lang="en-US" smtClean="0"/>
+              <a:rPr lang="en-US"/>
               <a:t>Third level</a:t>
             </a:r>
           </a:p>
           <a:p>
             <a:pPr lvl="3"/>
             <a:r>
-              <a:rPr lang="en-US" smtClean="0"/>
+              <a:rPr lang="en-US"/>
               <a:t>Fourth level</a:t>
             </a:r>
           </a:p>
           <a:p>
             <a:pPr lvl="4"/>
             <a:r>
-              <a:rPr lang="en-US" smtClean="0"/>
+              <a:rPr lang="en-US"/>
               <a:t>Fifth level</a:t>
             </a:r>
-            <a:endParaRPr lang="en-US"/>
           </a:p>
         </p:txBody>
       </p:sp>
@@ -1669,7 +1671,7 @@
           <a:p>
             <a:pPr lvl="0"/>
             <a:r>
-              <a:rPr lang="en-US" smtClean="0"/>
+              <a:rPr lang="en-US"/>
               <a:t>Click to edit Master text styles</a:t>
             </a:r>
           </a:p>
@@ -1725,38 +1727,37 @@
           <a:p>
             <a:pPr lvl="0"/>
             <a:r>
-              <a:rPr lang="en-US" smtClean="0"/>
+              <a:rPr lang="en-US"/>
               <a:t>Click to edit Master text styles</a:t>
             </a:r>
           </a:p>
           <a:p>
             <a:pPr lvl="1"/>
             <a:r>
-              <a:rPr lang="en-US" smtClean="0"/>
+              <a:rPr lang="en-US"/>
               <a:t>Second level</a:t>
             </a:r>
           </a:p>
           <a:p>
             <a:pPr lvl="2"/>
             <a:r>
-              <a:rPr lang="en-US" smtClean="0"/>
+              <a:rPr lang="en-US"/>
               <a:t>Third level</a:t>
             </a:r>
           </a:p>
           <a:p>
             <a:pPr lvl="3"/>
             <a:r>
-              <a:rPr lang="en-US" smtClean="0"/>
+              <a:rPr lang="en-US"/>
               <a:t>Fourth level</a:t>
             </a:r>
           </a:p>
           <a:p>
             <a:pPr lvl="4"/>
             <a:r>
-              <a:rPr lang="en-US" smtClean="0"/>
+              <a:rPr lang="en-US"/>
               <a:t>Fifth level</a:t>
             </a:r>
-            <a:endParaRPr lang="en-US"/>
           </a:p>
         </p:txBody>
       </p:sp>
@@ -1777,7 +1778,7 @@
           <a:p>
             <a:fld id="{5BCAD085-E8A6-8845-BD4E-CB4CCA059FC4}" type="datetimeFigureOut">
               <a:rPr lang="en-US" smtClean="0"/>
-              <a:t>1/27/13</a:t>
+              <a:t>4/7/26</a:t>
             </a:fld>
             <a:endParaRPr lang="en-US"/>
           </a:p>
@@ -1871,10 +1872,9 @@
           <a:lstStyle/>
           <a:p>
             <a:r>
-              <a:rPr lang="en-US" smtClean="0"/>
+              <a:rPr lang="en-US"/>
               <a:t>Click to edit Master title style</a:t>
             </a:r>
-            <a:endParaRPr lang="en-US"/>
           </a:p>
         </p:txBody>
       </p:sp>
@@ -1895,7 +1895,7 @@
           <a:p>
             <a:fld id="{5BCAD085-E8A6-8845-BD4E-CB4CCA059FC4}" type="datetimeFigureOut">
               <a:rPr lang="en-US" smtClean="0"/>
-              <a:t>1/27/13</a:t>
+              <a:t>4/7/26</a:t>
             </a:fld>
             <a:endParaRPr lang="en-US"/>
           </a:p>
@@ -1990,7 +1990,7 @@
           <a:p>
             <a:fld id="{5BCAD085-E8A6-8845-BD4E-CB4CCA059FC4}" type="datetimeFigureOut">
               <a:rPr lang="en-US" smtClean="0"/>
-              <a:t>1/27/13</a:t>
+              <a:t>4/7/26</a:t>
             </a:fld>
             <a:endParaRPr lang="en-US"/>
           </a:p>
@@ -2093,10 +2093,9 @@
           </a:lstStyle>
           <a:p>
             <a:r>
-              <a:rPr lang="en-US" smtClean="0"/>
+              <a:rPr lang="en-US"/>
               <a:t>Click to edit Master title style</a:t>
             </a:r>
-            <a:endParaRPr lang="en-US"/>
           </a:p>
         </p:txBody>
       </p:sp>
@@ -2150,38 +2149,37 @@
           <a:p>
             <a:pPr lvl="0"/>
             <a:r>
-              <a:rPr lang="en-US" smtClean="0"/>
+              <a:rPr lang="en-US"/>
               <a:t>Click to edit Master text styles</a:t>
             </a:r>
           </a:p>
           <a:p>
             <a:pPr lvl="1"/>
             <a:r>
-              <a:rPr lang="en-US" smtClean="0"/>
+              <a:rPr lang="en-US"/>
               <a:t>Second level</a:t>
             </a:r>
           </a:p>
           <a:p>
             <a:pPr lvl="2"/>
             <a:r>
-              <a:rPr lang="en-US" smtClean="0"/>
+              <a:rPr lang="en-US"/>
               <a:t>Third level</a:t>
             </a:r>
           </a:p>
           <a:p>
             <a:pPr lvl="3"/>
             <a:r>
-              <a:rPr lang="en-US" smtClean="0"/>
+              <a:rPr lang="en-US"/>
               <a:t>Fourth level</a:t>
             </a:r>
           </a:p>
           <a:p>
             <a:pPr lvl="4"/>
             <a:r>
-              <a:rPr lang="en-US" smtClean="0"/>
+              <a:rPr lang="en-US"/>
               <a:t>Fifth level</a:t>
             </a:r>
-            <a:endParaRPr lang="en-US"/>
           </a:p>
         </p:txBody>
       </p:sp>
@@ -2244,7 +2242,7 @@
           <a:p>
             <a:pPr lvl="0"/>
             <a:r>
-              <a:rPr lang="en-US" smtClean="0"/>
+              <a:rPr lang="en-US"/>
               <a:t>Click to edit Master text styles</a:t>
             </a:r>
           </a:p>
@@ -2267,7 +2265,7 @@
           <a:p>
             <a:fld id="{5BCAD085-E8A6-8845-BD4E-CB4CCA059FC4}" type="datetimeFigureOut">
               <a:rPr lang="en-US" smtClean="0"/>
-              <a:t>1/27/13</a:t>
+              <a:t>4/7/26</a:t>
             </a:fld>
             <a:endParaRPr lang="en-US"/>
           </a:p>
@@ -2370,10 +2368,9 @@
           </a:lstStyle>
           <a:p>
             <a:r>
-              <a:rPr lang="en-US" smtClean="0"/>
+              <a:rPr lang="en-US"/>
               <a:t>Click to edit Master title style</a:t>
             </a:r>
-            <a:endParaRPr lang="en-US"/>
           </a:p>
         </p:txBody>
       </p:sp>
@@ -2497,7 +2494,7 @@
           <a:p>
             <a:pPr lvl="0"/>
             <a:r>
-              <a:rPr lang="en-US" smtClean="0"/>
+              <a:rPr lang="en-US"/>
               <a:t>Click to edit Master text styles</a:t>
             </a:r>
           </a:p>
@@ -2520,7 +2517,7 @@
           <a:p>
             <a:fld id="{5BCAD085-E8A6-8845-BD4E-CB4CCA059FC4}" type="datetimeFigureOut">
               <a:rPr lang="en-US" smtClean="0"/>
-              <a:t>1/27/13</a:t>
+              <a:t>4/7/26</a:t>
             </a:fld>
             <a:endParaRPr lang="en-US"/>
           </a:p>
@@ -2629,10 +2626,9 @@
           <a:lstStyle/>
           <a:p>
             <a:r>
-              <a:rPr lang="en-US" smtClean="0"/>
+              <a:rPr lang="en-US"/>
               <a:t>Click to edit Master title style</a:t>
             </a:r>
-            <a:endParaRPr lang="en-US"/>
           </a:p>
         </p:txBody>
       </p:sp>
@@ -2663,38 +2659,37 @@
           <a:p>
             <a:pPr lvl="0"/>
             <a:r>
-              <a:rPr lang="en-US" smtClean="0"/>
+              <a:rPr lang="en-US"/>
               <a:t>Click to edit Master text styles</a:t>
             </a:r>
           </a:p>
           <a:p>
             <a:pPr lvl="1"/>
             <a:r>
-              <a:rPr lang="en-US" smtClean="0"/>
+              <a:rPr lang="en-US"/>
               <a:t>Second level</a:t>
             </a:r>
           </a:p>
           <a:p>
             <a:pPr lvl="2"/>
             <a:r>
-              <a:rPr lang="en-US" smtClean="0"/>
+              <a:rPr lang="en-US"/>
               <a:t>Third level</a:t>
             </a:r>
           </a:p>
           <a:p>
             <a:pPr lvl="3"/>
             <a:r>
-              <a:rPr lang="en-US" smtClean="0"/>
+              <a:rPr lang="en-US"/>
               <a:t>Fourth level</a:t>
             </a:r>
           </a:p>
           <a:p>
             <a:pPr lvl="4"/>
             <a:r>
-              <a:rPr lang="en-US" smtClean="0"/>
+              <a:rPr lang="en-US"/>
               <a:t>Fifth level</a:t>
             </a:r>
-            <a:endParaRPr lang="en-US"/>
           </a:p>
         </p:txBody>
       </p:sp>
@@ -2733,7 +2728,7 @@
           <a:p>
             <a:fld id="{5BCAD085-E8A6-8845-BD4E-CB4CCA059FC4}" type="datetimeFigureOut">
               <a:rPr lang="en-US" smtClean="0"/>
-              <a:t>1/27/13</a:t>
+              <a:t>4/7/26</a:t>
             </a:fld>
             <a:endParaRPr lang="en-US"/>
           </a:p>
@@ -3092,7 +3087,7 @@
 </file>
 
 <file path=ppt/slides/slide1.xml><?xml version="1.0" encoding="utf-8"?>
-<p:sld xmlns:a="http://schemas.openxmlformats.org/drawingml/2006/main" xmlns:p="http://schemas.openxmlformats.org/presentationml/2006/main" xmlns:r="http://schemas.openxmlformats.org/officeDocument/2006/relationships">
+<p:sld xmlns:a="http://schemas.openxmlformats.org/drawingml/2006/main" xmlns:r="http://schemas.openxmlformats.org/officeDocument/2006/relationships" xmlns:p="http://schemas.openxmlformats.org/presentationml/2006/main">
   <p:cSld>
     <p:bg>
       <p:bgPr>
@@ -3108,7 +3103,14 @@
         <p:cNvGrpSpPr/>
         <p:nvPr/>
       </p:nvGrpSpPr>
-      <p:grpSpPr/>
+      <p:grpSpPr>
+        <a:xfrm>
+          <a:off x="0" y="0"/>
+          <a:ext cx="0" cy="0"/>
+          <a:chOff x="0" y="0"/>
+          <a:chExt cx="0" cy="0"/>
+        </a:xfrm>
+      </p:grpSpPr>
       <p:sp>
         <p:nvSpPr>
           <p:cNvPr id="2" name="TextBox 1"/>
@@ -3299,6 +3301,7 @@
           <a:lstStyle/>
           <a:p>
             <a:pPr algn="ctr"/>
+            <a:endParaRPr/>
           </a:p>
         </p:txBody>
       </p:sp>
@@ -3416,6 +3419,7 @@
           <a:lstStyle/>
           <a:p>
             <a:pPr algn="ctr"/>
+            <a:endParaRPr/>
           </a:p>
         </p:txBody>
       </p:sp>
@@ -3533,6 +3537,7 @@
           <a:lstStyle/>
           <a:p>
             <a:pPr algn="ctr"/>
+            <a:endParaRPr/>
           </a:p>
         </p:txBody>
       </p:sp>
@@ -3650,6 +3655,7 @@
           <a:lstStyle/>
           <a:p>
             <a:pPr algn="ctr"/>
+            <a:endParaRPr/>
           </a:p>
         </p:txBody>
       </p:sp>
@@ -3806,7 +3812,7 @@
 </file>
 
 <file path=ppt/slides/slide10.xml><?xml version="1.0" encoding="utf-8"?>
-<p:sld xmlns:a="http://schemas.openxmlformats.org/drawingml/2006/main" xmlns:p="http://schemas.openxmlformats.org/presentationml/2006/main" xmlns:r="http://schemas.openxmlformats.org/officeDocument/2006/relationships">
+<p:sld xmlns:a="http://schemas.openxmlformats.org/drawingml/2006/main" xmlns:r="http://schemas.openxmlformats.org/officeDocument/2006/relationships" xmlns:p="http://schemas.openxmlformats.org/presentationml/2006/main">
   <p:cSld>
     <p:bg>
       <p:bgPr>
@@ -3822,7 +3828,38 @@
         <p:cNvGrpSpPr/>
         <p:nvPr/>
       </p:nvGrpSpPr>
-      <p:grpSpPr/>
+      <p:grpSpPr>
+        <a:xfrm>
+          <a:off x="0" y="0"/>
+          <a:ext cx="0" cy="0"/>
+          <a:chOff x="0" y="0"/>
+          <a:chExt cx="0" cy="0"/>
+        </a:xfrm>
+      </p:grpSpPr>
+      <p:pic>
+        <p:nvPicPr>
+          <p:cNvPr id="6" name="Picture 5" descr="anymal_c_deployment.png"/>
+          <p:cNvPicPr>
+            <a:picLocks noChangeAspect="1"/>
+          </p:cNvPicPr>
+          <p:nvPr/>
+        </p:nvPicPr>
+        <p:blipFill>
+          <a:blip r:embed="rId2"/>
+          <a:stretch>
+            <a:fillRect/>
+          </a:stretch>
+        </p:blipFill>
+        <p:spPr>
+          <a:xfrm>
+            <a:off x="1481328" y="1280160"/>
+            <a:ext cx="9007366" cy="5477992"/>
+          </a:xfrm>
+          <a:prstGeom prst="rect">
+            <a:avLst/>
+          </a:prstGeom>
+        </p:spPr>
+      </p:pic>
       <p:sp>
         <p:nvSpPr>
           <p:cNvPr id="2" name="TextBox 1"/>
@@ -3989,30 +4026,6 @@
           </a:p>
         </p:txBody>
       </p:sp>
-      <p:pic>
-        <p:nvPicPr>
-          <p:cNvPr id="6" name="Picture 5" descr="anymal_c_deployment.png"/>
-          <p:cNvPicPr>
-            <a:picLocks noChangeAspect="1"/>
-          </p:cNvPicPr>
-          <p:nvPr/>
-        </p:nvPicPr>
-        <p:blipFill>
-          <a:blip r:embed="rId2"/>
-          <a:stretch>
-            <a:fillRect/>
-          </a:stretch>
-        </p:blipFill>
-        <p:spPr>
-          <a:xfrm>
-            <a:off x="548640" y="1828800"/>
-            <a:ext cx="10972800" cy="4297680"/>
-          </a:xfrm>
-          <a:prstGeom prst="rect">
-            <a:avLst/>
-          </a:prstGeom>
-        </p:spPr>
-      </p:pic>
       <p:sp>
         <p:nvSpPr>
           <p:cNvPr id="7" name="TextBox 6"/>
@@ -4094,7 +4107,7 @@
 </file>
 
 <file path=ppt/slides/slide11.xml><?xml version="1.0" encoding="utf-8"?>
-<p:sld xmlns:a="http://schemas.openxmlformats.org/drawingml/2006/main" xmlns:p="http://schemas.openxmlformats.org/presentationml/2006/main" xmlns:r="http://schemas.openxmlformats.org/officeDocument/2006/relationships">
+<p:sld xmlns:a="http://schemas.openxmlformats.org/drawingml/2006/main" xmlns:r="http://schemas.openxmlformats.org/officeDocument/2006/relationships" xmlns:p="http://schemas.openxmlformats.org/presentationml/2006/main">
   <p:cSld>
     <p:bg>
       <p:bgPr>
@@ -4110,7 +4123,14 @@
         <p:cNvGrpSpPr/>
         <p:nvPr/>
       </p:nvGrpSpPr>
-      <p:grpSpPr/>
+      <p:grpSpPr>
+        <a:xfrm>
+          <a:off x="0" y="0"/>
+          <a:ext cx="0" cy="0"/>
+          <a:chOff x="0" y="0"/>
+          <a:chExt cx="0" cy="0"/>
+        </a:xfrm>
+      </p:grpSpPr>
       <p:sp>
         <p:nvSpPr>
           <p:cNvPr id="2" name="TextBox 1"/>
@@ -4319,6 +4339,7 @@
           <a:lstStyle/>
           <a:p>
             <a:pPr algn="ctr"/>
+            <a:endParaRPr/>
           </a:p>
         </p:txBody>
       </p:sp>
@@ -4472,6 +4493,7 @@
           <a:lstStyle/>
           <a:p>
             <a:pPr algn="ctr"/>
+            <a:endParaRPr/>
           </a:p>
         </p:txBody>
       </p:sp>
@@ -4625,6 +4647,7 @@
           <a:lstStyle/>
           <a:p>
             <a:pPr algn="ctr"/>
+            <a:endParaRPr/>
           </a:p>
         </p:txBody>
       </p:sp>
@@ -4778,6 +4801,7 @@
           <a:lstStyle/>
           <a:p>
             <a:pPr algn="ctr"/>
+            <a:endParaRPr/>
           </a:p>
         </p:txBody>
       </p:sp>
@@ -4931,6 +4955,7 @@
           <a:lstStyle/>
           <a:p>
             <a:pPr algn="ctr"/>
+            <a:endParaRPr/>
           </a:p>
         </p:txBody>
       </p:sp>
@@ -5084,6 +5109,7 @@
           <a:lstStyle/>
           <a:p>
             <a:pPr algn="ctr"/>
+            <a:endParaRPr/>
           </a:p>
         </p:txBody>
       </p:sp>
@@ -5237,6 +5263,7 @@
           <a:lstStyle/>
           <a:p>
             <a:pPr algn="ctr"/>
+            <a:endParaRPr/>
           </a:p>
         </p:txBody>
       </p:sp>
@@ -5390,6 +5417,7 @@
           <a:lstStyle/>
           <a:p>
             <a:pPr algn="ctr"/>
+            <a:endParaRPr/>
           </a:p>
         </p:txBody>
       </p:sp>
@@ -5543,6 +5571,7 @@
           <a:lstStyle/>
           <a:p>
             <a:pPr algn="ctr"/>
+            <a:endParaRPr/>
           </a:p>
         </p:txBody>
       </p:sp>
@@ -5696,6 +5725,7 @@
           <a:lstStyle/>
           <a:p>
             <a:pPr algn="ctr"/>
+            <a:endParaRPr/>
           </a:p>
         </p:txBody>
       </p:sp>
@@ -5849,6 +5879,7 @@
           <a:lstStyle/>
           <a:p>
             <a:pPr algn="ctr"/>
+            <a:endParaRPr/>
           </a:p>
         </p:txBody>
       </p:sp>
@@ -6002,6 +6033,7 @@
           <a:lstStyle/>
           <a:p>
             <a:pPr algn="ctr"/>
+            <a:endParaRPr/>
           </a:p>
         </p:txBody>
       </p:sp>
@@ -6155,6 +6187,7 @@
           <a:lstStyle/>
           <a:p>
             <a:pPr algn="ctr"/>
+            <a:endParaRPr/>
           </a:p>
         </p:txBody>
       </p:sp>
@@ -6275,7 +6308,7 @@
 </file>
 
 <file path=ppt/slides/slide12.xml><?xml version="1.0" encoding="utf-8"?>
-<p:sld xmlns:a="http://schemas.openxmlformats.org/drawingml/2006/main" xmlns:p="http://schemas.openxmlformats.org/presentationml/2006/main" xmlns:r="http://schemas.openxmlformats.org/officeDocument/2006/relationships">
+<p:sld xmlns:a="http://schemas.openxmlformats.org/drawingml/2006/main" xmlns:r="http://schemas.openxmlformats.org/officeDocument/2006/relationships" xmlns:p="http://schemas.openxmlformats.org/presentationml/2006/main">
   <p:cSld>
     <p:bg>
       <p:bgPr>
@@ -6291,7 +6324,14 @@
         <p:cNvGrpSpPr/>
         <p:nvPr/>
       </p:nvGrpSpPr>
-      <p:grpSpPr/>
+      <p:grpSpPr>
+        <a:xfrm>
+          <a:off x="0" y="0"/>
+          <a:ext cx="0" cy="0"/>
+          <a:chOff x="0" y="0"/>
+          <a:chExt cx="0" cy="0"/>
+        </a:xfrm>
+      </p:grpSpPr>
       <p:sp>
         <p:nvSpPr>
           <p:cNvPr id="2" name="TextBox 1"/>
@@ -6500,6 +6540,7 @@
           <a:lstStyle/>
           <a:p>
             <a:pPr algn="ctr"/>
+            <a:endParaRPr/>
           </a:p>
         </p:txBody>
       </p:sp>
@@ -6693,6 +6734,7 @@
           <a:lstStyle/>
           <a:p>
             <a:pPr algn="ctr"/>
+            <a:endParaRPr/>
           </a:p>
         </p:txBody>
       </p:sp>
@@ -6886,6 +6928,7 @@
           <a:lstStyle/>
           <a:p>
             <a:pPr algn="ctr"/>
+            <a:endParaRPr/>
           </a:p>
         </p:txBody>
       </p:sp>
@@ -7079,6 +7122,7 @@
           <a:lstStyle/>
           <a:p>
             <a:pPr algn="ctr"/>
+            <a:endParaRPr/>
           </a:p>
         </p:txBody>
       </p:sp>
@@ -7160,6 +7204,7 @@
           <a:lstStyle/>
           <a:p>
             <a:pPr algn="ctr"/>
+            <a:endParaRPr/>
           </a:p>
         </p:txBody>
       </p:sp>
@@ -7280,7 +7325,7 @@
 </file>
 
 <file path=ppt/slides/slide13.xml><?xml version="1.0" encoding="utf-8"?>
-<p:sld xmlns:a="http://schemas.openxmlformats.org/drawingml/2006/main" xmlns:p="http://schemas.openxmlformats.org/presentationml/2006/main" xmlns:r="http://schemas.openxmlformats.org/officeDocument/2006/relationships">
+<p:sld xmlns:a="http://schemas.openxmlformats.org/drawingml/2006/main" xmlns:r="http://schemas.openxmlformats.org/officeDocument/2006/relationships" xmlns:p="http://schemas.openxmlformats.org/presentationml/2006/main">
   <p:cSld>
     <p:bg>
       <p:bgPr>
@@ -7296,7 +7341,14 @@
         <p:cNvGrpSpPr/>
         <p:nvPr/>
       </p:nvGrpSpPr>
-      <p:grpSpPr/>
+      <p:grpSpPr>
+        <a:xfrm>
+          <a:off x="0" y="0"/>
+          <a:ext cx="0" cy="0"/>
+          <a:chOff x="0" y="0"/>
+          <a:chExt cx="0" cy="0"/>
+        </a:xfrm>
+      </p:grpSpPr>
       <p:sp>
         <p:nvSpPr>
           <p:cNvPr id="2" name="TextBox 1"/>
@@ -7721,6 +7773,7 @@
           <a:lstStyle/>
           <a:p>
             <a:pPr algn="ctr"/>
+            <a:endParaRPr/>
           </a:p>
         </p:txBody>
       </p:sp>
@@ -7874,6 +7927,7 @@
           <a:lstStyle/>
           <a:p>
             <a:pPr algn="ctr"/>
+            <a:endParaRPr/>
           </a:p>
         </p:txBody>
       </p:sp>
@@ -8027,6 +8081,7 @@
           <a:lstStyle/>
           <a:p>
             <a:pPr algn="ctr"/>
+            <a:endParaRPr/>
           </a:p>
         </p:txBody>
       </p:sp>
@@ -8180,6 +8235,7 @@
           <a:lstStyle/>
           <a:p>
             <a:pPr algn="ctr"/>
+            <a:endParaRPr/>
           </a:p>
         </p:txBody>
       </p:sp>
@@ -8333,6 +8389,7 @@
           <a:lstStyle/>
           <a:p>
             <a:pPr algn="ctr"/>
+            <a:endParaRPr/>
           </a:p>
         </p:txBody>
       </p:sp>
@@ -8486,6 +8543,7 @@
           <a:lstStyle/>
           <a:p>
             <a:pPr algn="ctr"/>
+            <a:endParaRPr/>
           </a:p>
         </p:txBody>
       </p:sp>
@@ -8642,7 +8700,7 @@
 </file>
 
 <file path=ppt/slides/slide14.xml><?xml version="1.0" encoding="utf-8"?>
-<p:sld xmlns:a="http://schemas.openxmlformats.org/drawingml/2006/main" xmlns:p="http://schemas.openxmlformats.org/presentationml/2006/main" xmlns:r="http://schemas.openxmlformats.org/officeDocument/2006/relationships">
+<p:sld xmlns:a="http://schemas.openxmlformats.org/drawingml/2006/main" xmlns:r="http://schemas.openxmlformats.org/officeDocument/2006/relationships" xmlns:p="http://schemas.openxmlformats.org/presentationml/2006/main">
   <p:cSld>
     <p:bg>
       <p:bgPr>
@@ -8658,7 +8716,14 @@
         <p:cNvGrpSpPr/>
         <p:nvPr/>
       </p:nvGrpSpPr>
-      <p:grpSpPr/>
+      <p:grpSpPr>
+        <a:xfrm>
+          <a:off x="0" y="0"/>
+          <a:ext cx="0" cy="0"/>
+          <a:chOff x="0" y="0"/>
+          <a:chExt cx="0" cy="0"/>
+        </a:xfrm>
+      </p:grpSpPr>
       <p:sp>
         <p:nvSpPr>
           <p:cNvPr id="2" name="TextBox 1"/>
@@ -8809,6 +8874,7 @@
           <a:lstStyle/>
           <a:p>
             <a:pPr algn="ctr"/>
+            <a:endParaRPr/>
           </a:p>
         </p:txBody>
       </p:sp>
@@ -8926,6 +8992,7 @@
           <a:lstStyle/>
           <a:p>
             <a:pPr algn="ctr"/>
+            <a:endParaRPr/>
           </a:p>
         </p:txBody>
       </p:sp>
@@ -9043,6 +9110,7 @@
           <a:lstStyle/>
           <a:p>
             <a:pPr algn="ctr"/>
+            <a:endParaRPr/>
           </a:p>
         </p:txBody>
       </p:sp>
@@ -9163,7 +9231,7 @@
 </file>
 
 <file path=ppt/slides/slide2.xml><?xml version="1.0" encoding="utf-8"?>
-<p:sld xmlns:a="http://schemas.openxmlformats.org/drawingml/2006/main" xmlns:p="http://schemas.openxmlformats.org/presentationml/2006/main" xmlns:r="http://schemas.openxmlformats.org/officeDocument/2006/relationships">
+<p:sld xmlns:a="http://schemas.openxmlformats.org/drawingml/2006/main" xmlns:r="http://schemas.openxmlformats.org/officeDocument/2006/relationships" xmlns:p="http://schemas.openxmlformats.org/presentationml/2006/main">
   <p:cSld>
     <p:bg>
       <p:bgPr>
@@ -9179,7 +9247,14 @@
         <p:cNvGrpSpPr/>
         <p:nvPr/>
       </p:nvGrpSpPr>
-      <p:grpSpPr/>
+      <p:grpSpPr>
+        <a:xfrm>
+          <a:off x="0" y="0"/>
+          <a:ext cx="0" cy="0"/>
+          <a:chOff x="0" y="0"/>
+          <a:chExt cx="0" cy="0"/>
+        </a:xfrm>
+      </p:grpSpPr>
       <p:sp>
         <p:nvSpPr>
           <p:cNvPr id="2" name="TextBox 1"/>
@@ -9388,6 +9463,7 @@
           <a:lstStyle/>
           <a:p>
             <a:pPr algn="ctr"/>
+            <a:endParaRPr/>
           </a:p>
         </p:txBody>
       </p:sp>
@@ -9431,6 +9507,7 @@
           <a:lstStyle/>
           <a:p>
             <a:pPr algn="ctr"/>
+            <a:endParaRPr/>
           </a:p>
         </p:txBody>
       </p:sp>
@@ -9548,6 +9625,7 @@
           <a:lstStyle/>
           <a:p>
             <a:pPr algn="ctr"/>
+            <a:endParaRPr/>
           </a:p>
         </p:txBody>
       </p:sp>
@@ -9591,6 +9669,7 @@
           <a:lstStyle/>
           <a:p>
             <a:pPr algn="ctr"/>
+            <a:endParaRPr/>
           </a:p>
         </p:txBody>
       </p:sp>
@@ -9708,6 +9787,7 @@
           <a:lstStyle/>
           <a:p>
             <a:pPr algn="ctr"/>
+            <a:endParaRPr/>
           </a:p>
         </p:txBody>
       </p:sp>
@@ -9751,6 +9831,7 @@
           <a:lstStyle/>
           <a:p>
             <a:pPr algn="ctr"/>
+            <a:endParaRPr/>
           </a:p>
         </p:txBody>
       </p:sp>
@@ -9868,6 +9949,7 @@
           <a:lstStyle/>
           <a:p>
             <a:pPr algn="ctr"/>
+            <a:endParaRPr/>
           </a:p>
         </p:txBody>
       </p:sp>
@@ -9911,6 +9993,7 @@
           <a:lstStyle/>
           <a:p>
             <a:pPr algn="ctr"/>
+            <a:endParaRPr/>
           </a:p>
         </p:txBody>
       </p:sp>
@@ -10028,6 +10111,7 @@
           <a:lstStyle/>
           <a:p>
             <a:pPr algn="ctr"/>
+            <a:endParaRPr/>
           </a:p>
         </p:txBody>
       </p:sp>
@@ -10071,6 +10155,7 @@
           <a:lstStyle/>
           <a:p>
             <a:pPr algn="ctr"/>
+            <a:endParaRPr/>
           </a:p>
         </p:txBody>
       </p:sp>
@@ -10188,6 +10273,7 @@
           <a:lstStyle/>
           <a:p>
             <a:pPr algn="ctr"/>
+            <a:endParaRPr/>
           </a:p>
         </p:txBody>
       </p:sp>
@@ -10231,6 +10317,7 @@
           <a:lstStyle/>
           <a:p>
             <a:pPr algn="ctr"/>
+            <a:endParaRPr/>
           </a:p>
         </p:txBody>
       </p:sp>
@@ -10348,6 +10435,7 @@
           <a:lstStyle/>
           <a:p>
             <a:pPr algn="ctr"/>
+            <a:endParaRPr/>
           </a:p>
         </p:txBody>
       </p:sp>
@@ -10391,6 +10479,7 @@
           <a:lstStyle/>
           <a:p>
             <a:pPr algn="ctr"/>
+            <a:endParaRPr/>
           </a:p>
         </p:txBody>
       </p:sp>
@@ -10508,6 +10597,7 @@
           <a:lstStyle/>
           <a:p>
             <a:pPr algn="ctr"/>
+            <a:endParaRPr/>
           </a:p>
         </p:txBody>
       </p:sp>
@@ -10664,7 +10754,7 @@
 </file>
 
 <file path=ppt/slides/slide3.xml><?xml version="1.0" encoding="utf-8"?>
-<p:sld xmlns:a="http://schemas.openxmlformats.org/drawingml/2006/main" xmlns:p="http://schemas.openxmlformats.org/presentationml/2006/main" xmlns:r="http://schemas.openxmlformats.org/officeDocument/2006/relationships">
+<p:sld xmlns:a="http://schemas.openxmlformats.org/drawingml/2006/main" xmlns:r="http://schemas.openxmlformats.org/officeDocument/2006/relationships" xmlns:p="http://schemas.openxmlformats.org/presentationml/2006/main">
   <p:cSld>
     <p:bg>
       <p:bgPr>
@@ -10680,7 +10770,14 @@
         <p:cNvGrpSpPr/>
         <p:nvPr/>
       </p:nvGrpSpPr>
-      <p:grpSpPr/>
+      <p:grpSpPr>
+        <a:xfrm>
+          <a:off x="0" y="0"/>
+          <a:ext cx="0" cy="0"/>
+          <a:chOff x="0" y="0"/>
+          <a:chExt cx="0" cy="0"/>
+        </a:xfrm>
+      </p:grpSpPr>
       <p:sp>
         <p:nvSpPr>
           <p:cNvPr id="2" name="TextBox 1"/>
@@ -10863,8 +10960,8 @@
         </p:blipFill>
         <p:spPr>
           <a:xfrm>
-            <a:off x="731520" y="1828800"/>
-            <a:ext cx="10515600" cy="4114800"/>
+            <a:off x="731520" y="1691640"/>
+            <a:ext cx="10515600" cy="4754880"/>
           </a:xfrm>
           <a:prstGeom prst="rect">
             <a:avLst/>
@@ -10952,7 +11049,7 @@
 </file>
 
 <file path=ppt/slides/slide4.xml><?xml version="1.0" encoding="utf-8"?>
-<p:sld xmlns:a="http://schemas.openxmlformats.org/drawingml/2006/main" xmlns:p="http://schemas.openxmlformats.org/presentationml/2006/main" xmlns:r="http://schemas.openxmlformats.org/officeDocument/2006/relationships">
+<p:sld xmlns:a="http://schemas.openxmlformats.org/drawingml/2006/main" xmlns:r="http://schemas.openxmlformats.org/officeDocument/2006/relationships" xmlns:p="http://schemas.openxmlformats.org/presentationml/2006/main">
   <p:cSld>
     <p:bg>
       <p:bgPr>
@@ -10968,7 +11065,14 @@
         <p:cNvGrpSpPr/>
         <p:nvPr/>
       </p:nvGrpSpPr>
-      <p:grpSpPr/>
+      <p:grpSpPr>
+        <a:xfrm>
+          <a:off x="0" y="0"/>
+          <a:ext cx="0" cy="0"/>
+          <a:chOff x="0" y="0"/>
+          <a:chExt cx="0" cy="0"/>
+        </a:xfrm>
+      </p:grpSpPr>
       <p:sp>
         <p:nvSpPr>
           <p:cNvPr id="2" name="TextBox 1"/>
@@ -11177,6 +11281,7 @@
           <a:lstStyle/>
           <a:p>
             <a:pPr algn="ctr"/>
+            <a:endParaRPr/>
           </a:p>
         </p:txBody>
       </p:sp>
@@ -11294,6 +11399,7 @@
           <a:lstStyle/>
           <a:p>
             <a:pPr algn="ctr"/>
+            <a:endParaRPr/>
           </a:p>
         </p:txBody>
       </p:sp>
@@ -11411,6 +11517,7 @@
           <a:lstStyle/>
           <a:p>
             <a:pPr algn="ctr"/>
+            <a:endParaRPr/>
           </a:p>
         </p:txBody>
       </p:sp>
@@ -11528,6 +11635,7 @@
           <a:lstStyle/>
           <a:p>
             <a:pPr algn="ctr"/>
+            <a:endParaRPr/>
           </a:p>
         </p:txBody>
       </p:sp>
@@ -11645,6 +11753,7 @@
           <a:lstStyle/>
           <a:p>
             <a:pPr algn="ctr"/>
+            <a:endParaRPr/>
           </a:p>
         </p:txBody>
       </p:sp>
@@ -11762,6 +11871,7 @@
           <a:lstStyle/>
           <a:p>
             <a:pPr algn="ctr"/>
+            <a:endParaRPr/>
           </a:p>
         </p:txBody>
       </p:sp>
@@ -11879,6 +11989,7 @@
           <a:lstStyle/>
           <a:p>
             <a:pPr algn="ctr"/>
+            <a:endParaRPr/>
           </a:p>
         </p:txBody>
       </p:sp>
@@ -11979,6 +12090,7 @@
                 <a:latin typeface="Calibri"/>
               </a:defRPr>
             </a:pPr>
+            <a:endParaRPr/>
           </a:p>
           <a:p>
             <a:pPr>
@@ -12040,6 +12152,7 @@
                 <a:latin typeface="Calibri"/>
               </a:defRPr>
             </a:pPr>
+            <a:endParaRPr/>
           </a:p>
           <a:p>
             <a:pPr>
@@ -12133,6 +12246,7 @@
           <a:lstStyle/>
           <a:p>
             <a:pPr algn="ctr"/>
+            <a:endParaRPr/>
           </a:p>
         </p:txBody>
       </p:sp>
@@ -12253,7 +12367,7 @@
 </file>
 
 <file path=ppt/slides/slide5.xml><?xml version="1.0" encoding="utf-8"?>
-<p:sld xmlns:a="http://schemas.openxmlformats.org/drawingml/2006/main" xmlns:p="http://schemas.openxmlformats.org/presentationml/2006/main" xmlns:r="http://schemas.openxmlformats.org/officeDocument/2006/relationships">
+<p:sld xmlns:a="http://schemas.openxmlformats.org/drawingml/2006/main" xmlns:r="http://schemas.openxmlformats.org/officeDocument/2006/relationships" xmlns:p="http://schemas.openxmlformats.org/presentationml/2006/main">
   <p:cSld>
     <p:bg>
       <p:bgPr>
@@ -12269,7 +12383,14 @@
         <p:cNvGrpSpPr/>
         <p:nvPr/>
       </p:nvGrpSpPr>
-      <p:grpSpPr/>
+      <p:grpSpPr>
+        <a:xfrm>
+          <a:off x="0" y="0"/>
+          <a:ext cx="0" cy="0"/>
+          <a:chOff x="0" y="0"/>
+          <a:chExt cx="0" cy="0"/>
+        </a:xfrm>
+      </p:grpSpPr>
       <p:sp>
         <p:nvSpPr>
           <p:cNvPr id="2" name="TextBox 1"/>
@@ -12478,6 +12599,7 @@
           <a:lstStyle/>
           <a:p>
             <a:pPr algn="ctr"/>
+            <a:endParaRPr/>
           </a:p>
         </p:txBody>
       </p:sp>
@@ -12595,6 +12717,7 @@
           <a:lstStyle/>
           <a:p>
             <a:pPr algn="ctr"/>
+            <a:endParaRPr/>
           </a:p>
         </p:txBody>
       </p:sp>
@@ -12712,6 +12835,7 @@
           <a:lstStyle/>
           <a:p>
             <a:pPr algn="ctr"/>
+            <a:endParaRPr/>
           </a:p>
         </p:txBody>
       </p:sp>
@@ -12829,6 +12953,7 @@
           <a:lstStyle/>
           <a:p>
             <a:pPr algn="ctr"/>
+            <a:endParaRPr/>
           </a:p>
         </p:txBody>
       </p:sp>
@@ -12982,6 +13107,7 @@
           <a:lstStyle/>
           <a:p>
             <a:pPr algn="ctr"/>
+            <a:endParaRPr/>
           </a:p>
         </p:txBody>
       </p:sp>
@@ -13135,6 +13261,7 @@
           <a:lstStyle/>
           <a:p>
             <a:pPr algn="ctr"/>
+            <a:endParaRPr/>
           </a:p>
         </p:txBody>
       </p:sp>
@@ -13327,7 +13454,7 @@
 </file>
 
 <file path=ppt/slides/slide6.xml><?xml version="1.0" encoding="utf-8"?>
-<p:sld xmlns:a="http://schemas.openxmlformats.org/drawingml/2006/main" xmlns:p="http://schemas.openxmlformats.org/presentationml/2006/main" xmlns:r="http://schemas.openxmlformats.org/officeDocument/2006/relationships">
+<p:sld xmlns:a="http://schemas.openxmlformats.org/drawingml/2006/main" xmlns:r="http://schemas.openxmlformats.org/officeDocument/2006/relationships" xmlns:p="http://schemas.openxmlformats.org/presentationml/2006/main">
   <p:cSld>
     <p:bg>
       <p:bgPr>
@@ -13343,7 +13470,14 @@
         <p:cNvGrpSpPr/>
         <p:nvPr/>
       </p:nvGrpSpPr>
-      <p:grpSpPr/>
+      <p:grpSpPr>
+        <a:xfrm>
+          <a:off x="0" y="0"/>
+          <a:ext cx="0" cy="0"/>
+          <a:chOff x="0" y="0"/>
+          <a:chExt cx="0" cy="0"/>
+        </a:xfrm>
+      </p:grpSpPr>
       <p:sp>
         <p:nvSpPr>
           <p:cNvPr id="2" name="TextBox 1"/>
@@ -13552,6 +13686,7 @@
           <a:lstStyle/>
           <a:p>
             <a:pPr algn="ctr"/>
+            <a:endParaRPr/>
           </a:p>
         </p:txBody>
       </p:sp>
@@ -13595,6 +13730,7 @@
           <a:lstStyle/>
           <a:p>
             <a:pPr algn="ctr"/>
+            <a:endParaRPr/>
           </a:p>
         </p:txBody>
       </p:sp>
@@ -13784,6 +13920,7 @@
           <a:lstStyle/>
           <a:p>
             <a:pPr algn="ctr"/>
+            <a:endParaRPr/>
           </a:p>
         </p:txBody>
       </p:sp>
@@ -13827,6 +13964,7 @@
           <a:lstStyle/>
           <a:p>
             <a:pPr algn="ctr"/>
+            <a:endParaRPr/>
           </a:p>
         </p:txBody>
       </p:sp>
@@ -14016,6 +14154,7 @@
           <a:lstStyle/>
           <a:p>
             <a:pPr algn="ctr"/>
+            <a:endParaRPr/>
           </a:p>
         </p:txBody>
       </p:sp>
@@ -14059,6 +14198,7 @@
           <a:lstStyle/>
           <a:p>
             <a:pPr algn="ctr"/>
+            <a:endParaRPr/>
           </a:p>
         </p:txBody>
       </p:sp>
@@ -14248,6 +14388,7 @@
           <a:lstStyle/>
           <a:p>
             <a:pPr algn="ctr"/>
+            <a:endParaRPr/>
           </a:p>
         </p:txBody>
       </p:sp>
@@ -14291,6 +14432,7 @@
           <a:lstStyle/>
           <a:p>
             <a:pPr algn="ctr"/>
+            <a:endParaRPr/>
           </a:p>
         </p:txBody>
       </p:sp>
@@ -14480,6 +14622,7 @@
           <a:lstStyle/>
           <a:p>
             <a:pPr algn="ctr"/>
+            <a:endParaRPr/>
           </a:p>
         </p:txBody>
       </p:sp>
@@ -14624,7 +14767,7 @@
 </file>
 
 <file path=ppt/slides/slide7.xml><?xml version="1.0" encoding="utf-8"?>
-<p:sld xmlns:a="http://schemas.openxmlformats.org/drawingml/2006/main" xmlns:p="http://schemas.openxmlformats.org/presentationml/2006/main" xmlns:r="http://schemas.openxmlformats.org/officeDocument/2006/relationships">
+<p:sld xmlns:a="http://schemas.openxmlformats.org/drawingml/2006/main" xmlns:r="http://schemas.openxmlformats.org/officeDocument/2006/relationships" xmlns:p="http://schemas.openxmlformats.org/presentationml/2006/main">
   <p:cSld>
     <p:bg>
       <p:bgPr>
@@ -14640,7 +14783,14 @@
         <p:cNvGrpSpPr/>
         <p:nvPr/>
       </p:nvGrpSpPr>
-      <p:grpSpPr/>
+      <p:grpSpPr>
+        <a:xfrm>
+          <a:off x="0" y="0"/>
+          <a:ext cx="0" cy="0"/>
+          <a:chOff x="0" y="0"/>
+          <a:chExt cx="0" cy="0"/>
+        </a:xfrm>
+      </p:grpSpPr>
       <p:sp>
         <p:nvSpPr>
           <p:cNvPr id="2" name="TextBox 1"/>
@@ -14897,6 +15047,7 @@
           <a:lstStyle/>
           <a:p>
             <a:pPr algn="ctr"/>
+            <a:endParaRPr/>
           </a:p>
         </p:txBody>
       </p:sp>
@@ -15014,6 +15165,7 @@
           <a:lstStyle/>
           <a:p>
             <a:pPr algn="ctr"/>
+            <a:endParaRPr/>
           </a:p>
         </p:txBody>
       </p:sp>
@@ -15131,6 +15283,7 @@
           <a:lstStyle/>
           <a:p>
             <a:pPr algn="ctr"/>
+            <a:endParaRPr/>
           </a:p>
         </p:txBody>
       </p:sp>
@@ -15248,6 +15401,7 @@
           <a:lstStyle/>
           <a:p>
             <a:pPr algn="ctr"/>
+            <a:endParaRPr/>
           </a:p>
         </p:txBody>
       </p:sp>
@@ -15404,7 +15558,7 @@
 </file>
 
 <file path=ppt/slides/slide8.xml><?xml version="1.0" encoding="utf-8"?>
-<p:sld xmlns:a="http://schemas.openxmlformats.org/drawingml/2006/main" xmlns:p="http://schemas.openxmlformats.org/presentationml/2006/main" xmlns:r="http://schemas.openxmlformats.org/officeDocument/2006/relationships">
+<p:sld xmlns:a="http://schemas.openxmlformats.org/drawingml/2006/main" xmlns:r="http://schemas.openxmlformats.org/officeDocument/2006/relationships" xmlns:p="http://schemas.openxmlformats.org/presentationml/2006/main">
   <p:cSld>
     <p:bg>
       <p:bgPr>
@@ -15420,7 +15574,14 @@
         <p:cNvGrpSpPr/>
         <p:nvPr/>
       </p:nvGrpSpPr>
-      <p:grpSpPr/>
+      <p:grpSpPr>
+        <a:xfrm>
+          <a:off x="0" y="0"/>
+          <a:ext cx="0" cy="0"/>
+          <a:chOff x="0" y="0"/>
+          <a:chExt cx="0" cy="0"/>
+        </a:xfrm>
+      </p:grpSpPr>
       <p:sp>
         <p:nvSpPr>
           <p:cNvPr id="2" name="TextBox 1"/>
@@ -15689,6 +15850,7 @@
           <a:lstStyle/>
           <a:p>
             <a:pPr algn="ctr"/>
+            <a:endParaRPr/>
           </a:p>
         </p:txBody>
       </p:sp>
@@ -15842,6 +16004,7 @@
           <a:lstStyle/>
           <a:p>
             <a:pPr algn="ctr"/>
+            <a:endParaRPr/>
           </a:p>
         </p:txBody>
       </p:sp>
@@ -15995,6 +16158,7 @@
           <a:lstStyle/>
           <a:p>
             <a:pPr algn="ctr"/>
+            <a:endParaRPr/>
           </a:p>
         </p:txBody>
       </p:sp>
@@ -16148,6 +16312,7 @@
           <a:lstStyle/>
           <a:p>
             <a:pPr algn="ctr"/>
+            <a:endParaRPr/>
           </a:p>
         </p:txBody>
       </p:sp>
@@ -16301,6 +16466,7 @@
           <a:lstStyle/>
           <a:p>
             <a:pPr algn="ctr"/>
+            <a:endParaRPr/>
           </a:p>
         </p:txBody>
       </p:sp>
@@ -16493,7 +16659,7 @@
 </file>
 
 <file path=ppt/slides/slide9.xml><?xml version="1.0" encoding="utf-8"?>
-<p:sld xmlns:a="http://schemas.openxmlformats.org/drawingml/2006/main" xmlns:p="http://schemas.openxmlformats.org/presentationml/2006/main" xmlns:r="http://schemas.openxmlformats.org/officeDocument/2006/relationships">
+<p:sld xmlns:a="http://schemas.openxmlformats.org/drawingml/2006/main" xmlns:r="http://schemas.openxmlformats.org/officeDocument/2006/relationships" xmlns:p="http://schemas.openxmlformats.org/presentationml/2006/main">
   <p:cSld>
     <p:bg>
       <p:bgPr>
@@ -16509,7 +16675,14 @@
         <p:cNvGrpSpPr/>
         <p:nvPr/>
       </p:nvGrpSpPr>
-      <p:grpSpPr/>
+      <p:grpSpPr>
+        <a:xfrm>
+          <a:off x="0" y="0"/>
+          <a:ext cx="0" cy="0"/>
+          <a:chOff x="0" y="0"/>
+          <a:chExt cx="0" cy="0"/>
+        </a:xfrm>
+      </p:grpSpPr>
       <p:sp>
         <p:nvSpPr>
           <p:cNvPr id="2" name="TextBox 1"/>
@@ -16692,8 +16865,8 @@
         </p:blipFill>
         <p:spPr>
           <a:xfrm>
-            <a:off x="548640" y="1828800"/>
-            <a:ext cx="10972800" cy="4297680"/>
+            <a:off x="1587062" y="1600200"/>
+            <a:ext cx="8891752" cy="5074920"/>
           </a:xfrm>
           <a:prstGeom prst="rect">
             <a:avLst/>

--- a/Physical_AI_Workshop.pptx
+++ b/Physical_AI_Workshop.pptx
@@ -315,7 +315,7 @@
           <a:p>
             <a:fld id="{5BCAD085-E8A6-8845-BD4E-CB4CCA059FC4}" type="datetimeFigureOut">
               <a:rPr lang="en-US" smtClean="0"/>
-              <a:t>4/7/26</a:t>
+              <a:t>4/8/26</a:t>
             </a:fld>
             <a:endParaRPr lang="en-US"/>
           </a:p>
@@ -483,7 +483,7 @@
           <a:p>
             <a:fld id="{5BCAD085-E8A6-8845-BD4E-CB4CCA059FC4}" type="datetimeFigureOut">
               <a:rPr lang="en-US" smtClean="0"/>
-              <a:t>4/7/26</a:t>
+              <a:t>4/8/26</a:t>
             </a:fld>
             <a:endParaRPr lang="en-US"/>
           </a:p>
@@ -661,7 +661,7 @@
           <a:p>
             <a:fld id="{5BCAD085-E8A6-8845-BD4E-CB4CCA059FC4}" type="datetimeFigureOut">
               <a:rPr lang="en-US" smtClean="0"/>
-              <a:t>4/7/26</a:t>
+              <a:t>4/8/26</a:t>
             </a:fld>
             <a:endParaRPr lang="en-US"/>
           </a:p>
@@ -829,7 +829,7 @@
           <a:p>
             <a:fld id="{5BCAD085-E8A6-8845-BD4E-CB4CCA059FC4}" type="datetimeFigureOut">
               <a:rPr lang="en-US" smtClean="0"/>
-              <a:t>4/7/26</a:t>
+              <a:t>4/8/26</a:t>
             </a:fld>
             <a:endParaRPr lang="en-US"/>
           </a:p>
@@ -1074,7 +1074,7 @@
           <a:p>
             <a:fld id="{5BCAD085-E8A6-8845-BD4E-CB4CCA059FC4}" type="datetimeFigureOut">
               <a:rPr lang="en-US" smtClean="0"/>
-              <a:t>4/7/26</a:t>
+              <a:t>4/8/26</a:t>
             </a:fld>
             <a:endParaRPr lang="en-US"/>
           </a:p>
@@ -1359,7 +1359,7 @@
           <a:p>
             <a:fld id="{5BCAD085-E8A6-8845-BD4E-CB4CCA059FC4}" type="datetimeFigureOut">
               <a:rPr lang="en-US" smtClean="0"/>
-              <a:t>4/7/26</a:t>
+              <a:t>4/8/26</a:t>
             </a:fld>
             <a:endParaRPr lang="en-US"/>
           </a:p>
@@ -1778,7 +1778,7 @@
           <a:p>
             <a:fld id="{5BCAD085-E8A6-8845-BD4E-CB4CCA059FC4}" type="datetimeFigureOut">
               <a:rPr lang="en-US" smtClean="0"/>
-              <a:t>4/7/26</a:t>
+              <a:t>4/8/26</a:t>
             </a:fld>
             <a:endParaRPr lang="en-US"/>
           </a:p>
@@ -1895,7 +1895,7 @@
           <a:p>
             <a:fld id="{5BCAD085-E8A6-8845-BD4E-CB4CCA059FC4}" type="datetimeFigureOut">
               <a:rPr lang="en-US" smtClean="0"/>
-              <a:t>4/7/26</a:t>
+              <a:t>4/8/26</a:t>
             </a:fld>
             <a:endParaRPr lang="en-US"/>
           </a:p>
@@ -1990,7 +1990,7 @@
           <a:p>
             <a:fld id="{5BCAD085-E8A6-8845-BD4E-CB4CCA059FC4}" type="datetimeFigureOut">
               <a:rPr lang="en-US" smtClean="0"/>
-              <a:t>4/7/26</a:t>
+              <a:t>4/8/26</a:t>
             </a:fld>
             <a:endParaRPr lang="en-US"/>
           </a:p>
@@ -2265,7 +2265,7 @@
           <a:p>
             <a:fld id="{5BCAD085-E8A6-8845-BD4E-CB4CCA059FC4}" type="datetimeFigureOut">
               <a:rPr lang="en-US" smtClean="0"/>
-              <a:t>4/7/26</a:t>
+              <a:t>4/8/26</a:t>
             </a:fld>
             <a:endParaRPr lang="en-US"/>
           </a:p>
@@ -2517,7 +2517,7 @@
           <a:p>
             <a:fld id="{5BCAD085-E8A6-8845-BD4E-CB4CCA059FC4}" type="datetimeFigureOut">
               <a:rPr lang="en-US" smtClean="0"/>
-              <a:t>4/7/26</a:t>
+              <a:t>4/8/26</a:t>
             </a:fld>
             <a:endParaRPr lang="en-US"/>
           </a:p>
@@ -2728,7 +2728,7 @@
           <a:p>
             <a:fld id="{5BCAD085-E8A6-8845-BD4E-CB4CCA059FC4}" type="datetimeFigureOut">
               <a:rPr lang="en-US" smtClean="0"/>
-              <a:t>4/7/26</a:t>
+              <a:t>4/8/26</a:t>
             </a:fld>
             <a:endParaRPr lang="en-US"/>
           </a:p>
@@ -3092,7 +3092,7 @@
     <p:bg>
       <p:bgPr>
         <a:solidFill>
-          <a:srgbClr val="06080F"/>
+          <a:srgbClr val="121524"/>
         </a:solidFill>
         <a:effectLst/>
       </p:bgPr>
@@ -3274,11 +3274,11 @@
             <a:avLst/>
           </a:prstGeom>
           <a:solidFill>
-            <a:srgbClr val="0C1022"/>
+            <a:srgbClr val="1A1E32"/>
           </a:solidFill>
           <a:ln w="12700">
             <a:solidFill>
-              <a:srgbClr val="1E293B"/>
+              <a:srgbClr val="2D384F"/>
             </a:solidFill>
           </a:ln>
         </p:spPr>
@@ -3392,11 +3392,11 @@
             <a:avLst/>
           </a:prstGeom>
           <a:solidFill>
-            <a:srgbClr val="0C1022"/>
+            <a:srgbClr val="1A1E32"/>
           </a:solidFill>
           <a:ln w="12700">
             <a:solidFill>
-              <a:srgbClr val="1E293B"/>
+              <a:srgbClr val="2D384F"/>
             </a:solidFill>
           </a:ln>
         </p:spPr>
@@ -3510,11 +3510,11 @@
             <a:avLst/>
           </a:prstGeom>
           <a:solidFill>
-            <a:srgbClr val="0C1022"/>
+            <a:srgbClr val="1A1E32"/>
           </a:solidFill>
           <a:ln w="12700">
             <a:solidFill>
-              <a:srgbClr val="1E293B"/>
+              <a:srgbClr val="2D384F"/>
             </a:solidFill>
           </a:ln>
         </p:spPr>
@@ -3628,11 +3628,11 @@
             <a:avLst/>
           </a:prstGeom>
           <a:solidFill>
-            <a:srgbClr val="0C1022"/>
+            <a:srgbClr val="1A1E32"/>
           </a:solidFill>
           <a:ln w="12700">
             <a:solidFill>
-              <a:srgbClr val="1E293B"/>
+              <a:srgbClr val="2D384F"/>
             </a:solidFill>
           </a:ln>
         </p:spPr>
@@ -3817,7 +3817,7 @@
     <p:bg>
       <p:bgPr>
         <a:solidFill>
-          <a:srgbClr val="06080F"/>
+          <a:srgbClr val="121524"/>
         </a:solidFill>
         <a:effectLst/>
       </p:bgPr>
@@ -3836,30 +3836,6 @@
           <a:chExt cx="0" cy="0"/>
         </a:xfrm>
       </p:grpSpPr>
-      <p:pic>
-        <p:nvPicPr>
-          <p:cNvPr id="6" name="Picture 5" descr="anymal_c_deployment.png"/>
-          <p:cNvPicPr>
-            <a:picLocks noChangeAspect="1"/>
-          </p:cNvPicPr>
-          <p:nvPr/>
-        </p:nvPicPr>
-        <p:blipFill>
-          <a:blip r:embed="rId2"/>
-          <a:stretch>
-            <a:fillRect/>
-          </a:stretch>
-        </p:blipFill>
-        <p:spPr>
-          <a:xfrm>
-            <a:off x="1481328" y="1280160"/>
-            <a:ext cx="9007366" cy="5477992"/>
-          </a:xfrm>
-          <a:prstGeom prst="rect">
-            <a:avLst/>
-          </a:prstGeom>
-        </p:spPr>
-      </p:pic>
       <p:sp>
         <p:nvSpPr>
           <p:cNvPr id="2" name="TextBox 1"/>
@@ -4026,6 +4002,30 @@
           </a:p>
         </p:txBody>
       </p:sp>
+      <p:pic>
+        <p:nvPicPr>
+          <p:cNvPr id="6" name="Picture 5" descr="anymal_c_deployment.png"/>
+          <p:cNvPicPr>
+            <a:picLocks noChangeAspect="1"/>
+          </p:cNvPicPr>
+          <p:nvPr/>
+        </p:nvPicPr>
+        <p:blipFill>
+          <a:blip r:embed="rId2"/>
+          <a:stretch>
+            <a:fillRect/>
+          </a:stretch>
+        </p:blipFill>
+        <p:spPr>
+          <a:xfrm>
+            <a:off x="1618593" y="1645920"/>
+            <a:ext cx="9049408" cy="4663440"/>
+          </a:xfrm>
+          <a:prstGeom prst="rect">
+            <a:avLst/>
+          </a:prstGeom>
+        </p:spPr>
+      </p:pic>
       <p:sp>
         <p:nvSpPr>
           <p:cNvPr id="7" name="TextBox 6"/>
@@ -4112,7 +4112,7 @@
     <p:bg>
       <p:bgPr>
         <a:solidFill>
-          <a:srgbClr val="06080F"/>
+          <a:srgbClr val="121524"/>
         </a:solidFill>
         <a:effectLst/>
       </p:bgPr>
@@ -4312,11 +4312,11 @@
             <a:avLst/>
           </a:prstGeom>
           <a:solidFill>
-            <a:srgbClr val="0C1022"/>
+            <a:srgbClr val="1A1E32"/>
           </a:solidFill>
           <a:ln w="12700">
             <a:solidFill>
-              <a:srgbClr val="1E293B"/>
+              <a:srgbClr val="2D384F"/>
             </a:solidFill>
           </a:ln>
         </p:spPr>
@@ -4466,11 +4466,11 @@
             <a:avLst/>
           </a:prstGeom>
           <a:solidFill>
-            <a:srgbClr val="0C1022"/>
+            <a:srgbClr val="1A1E32"/>
           </a:solidFill>
           <a:ln w="12700">
             <a:solidFill>
-              <a:srgbClr val="1E293B"/>
+              <a:srgbClr val="2D384F"/>
             </a:solidFill>
           </a:ln>
         </p:spPr>
@@ -4620,11 +4620,11 @@
             <a:avLst/>
           </a:prstGeom>
           <a:solidFill>
-            <a:srgbClr val="0C1022"/>
+            <a:srgbClr val="1A1E32"/>
           </a:solidFill>
           <a:ln w="12700">
             <a:solidFill>
-              <a:srgbClr val="1E293B"/>
+              <a:srgbClr val="2D384F"/>
             </a:solidFill>
           </a:ln>
         </p:spPr>
@@ -4774,11 +4774,11 @@
             <a:avLst/>
           </a:prstGeom>
           <a:solidFill>
-            <a:srgbClr val="0C1022"/>
+            <a:srgbClr val="1A1E32"/>
           </a:solidFill>
           <a:ln w="12700">
             <a:solidFill>
-              <a:srgbClr val="1E293B"/>
+              <a:srgbClr val="2D384F"/>
             </a:solidFill>
           </a:ln>
         </p:spPr>
@@ -4928,11 +4928,11 @@
             <a:avLst/>
           </a:prstGeom>
           <a:solidFill>
-            <a:srgbClr val="0C1022"/>
+            <a:srgbClr val="1A1E32"/>
           </a:solidFill>
           <a:ln w="12700">
             <a:solidFill>
-              <a:srgbClr val="1E293B"/>
+              <a:srgbClr val="2D384F"/>
             </a:solidFill>
           </a:ln>
         </p:spPr>
@@ -5082,11 +5082,11 @@
             <a:avLst/>
           </a:prstGeom>
           <a:solidFill>
-            <a:srgbClr val="0C1022"/>
+            <a:srgbClr val="1A1E32"/>
           </a:solidFill>
           <a:ln w="12700">
             <a:solidFill>
-              <a:srgbClr val="1E293B"/>
+              <a:srgbClr val="2D384F"/>
             </a:solidFill>
           </a:ln>
         </p:spPr>
@@ -5236,11 +5236,11 @@
             <a:avLst/>
           </a:prstGeom>
           <a:solidFill>
-            <a:srgbClr val="0C1022"/>
+            <a:srgbClr val="1A1E32"/>
           </a:solidFill>
           <a:ln w="12700">
             <a:solidFill>
-              <a:srgbClr val="1E293B"/>
+              <a:srgbClr val="2D384F"/>
             </a:solidFill>
           </a:ln>
         </p:spPr>
@@ -5390,11 +5390,11 @@
             <a:avLst/>
           </a:prstGeom>
           <a:solidFill>
-            <a:srgbClr val="0C1022"/>
+            <a:srgbClr val="1A1E32"/>
           </a:solidFill>
           <a:ln w="12700">
             <a:solidFill>
-              <a:srgbClr val="1E293B"/>
+              <a:srgbClr val="2D384F"/>
             </a:solidFill>
           </a:ln>
         </p:spPr>
@@ -5544,11 +5544,11 @@
             <a:avLst/>
           </a:prstGeom>
           <a:solidFill>
-            <a:srgbClr val="0C1022"/>
+            <a:srgbClr val="1A1E32"/>
           </a:solidFill>
           <a:ln w="12700">
             <a:solidFill>
-              <a:srgbClr val="1E293B"/>
+              <a:srgbClr val="2D384F"/>
             </a:solidFill>
           </a:ln>
         </p:spPr>
@@ -5698,11 +5698,11 @@
             <a:avLst/>
           </a:prstGeom>
           <a:solidFill>
-            <a:srgbClr val="0C1022"/>
+            <a:srgbClr val="1A1E32"/>
           </a:solidFill>
           <a:ln w="12700">
             <a:solidFill>
-              <a:srgbClr val="1E293B"/>
+              <a:srgbClr val="2D384F"/>
             </a:solidFill>
           </a:ln>
         </p:spPr>
@@ -5852,11 +5852,11 @@
             <a:avLst/>
           </a:prstGeom>
           <a:solidFill>
-            <a:srgbClr val="0C1022"/>
+            <a:srgbClr val="1A1E32"/>
           </a:solidFill>
           <a:ln w="12700">
             <a:solidFill>
-              <a:srgbClr val="1E293B"/>
+              <a:srgbClr val="2D384F"/>
             </a:solidFill>
           </a:ln>
         </p:spPr>
@@ -6006,11 +6006,11 @@
             <a:avLst/>
           </a:prstGeom>
           <a:solidFill>
-            <a:srgbClr val="0C1022"/>
+            <a:srgbClr val="1A1E32"/>
           </a:solidFill>
           <a:ln w="12700">
             <a:solidFill>
-              <a:srgbClr val="1E293B"/>
+              <a:srgbClr val="2D384F"/>
             </a:solidFill>
           </a:ln>
         </p:spPr>
@@ -6313,7 +6313,7 @@
     <p:bg>
       <p:bgPr>
         <a:solidFill>
-          <a:srgbClr val="06080F"/>
+          <a:srgbClr val="121524"/>
         </a:solidFill>
         <a:effectLst/>
       </p:bgPr>
@@ -6513,7 +6513,7 @@
             <a:avLst/>
           </a:prstGeom>
           <a:solidFill>
-            <a:srgbClr val="0C1022"/>
+            <a:srgbClr val="1A1E32"/>
           </a:solidFill>
           <a:ln w="12700">
             <a:solidFill>
@@ -6707,7 +6707,7 @@
             <a:avLst/>
           </a:prstGeom>
           <a:solidFill>
-            <a:srgbClr val="0C1022"/>
+            <a:srgbClr val="1A1E32"/>
           </a:solidFill>
           <a:ln w="12700">
             <a:solidFill>
@@ -6901,7 +6901,7 @@
             <a:avLst/>
           </a:prstGeom>
           <a:solidFill>
-            <a:srgbClr val="0C1022"/>
+            <a:srgbClr val="1A1E32"/>
           </a:solidFill>
           <a:ln w="12700">
             <a:solidFill>
@@ -7330,7 +7330,7 @@
     <p:bg>
       <p:bgPr>
         <a:solidFill>
-          <a:srgbClr val="06080F"/>
+          <a:srgbClr val="121524"/>
         </a:solidFill>
         <a:effectLst/>
       </p:bgPr>
@@ -7746,11 +7746,11 @@
             <a:avLst/>
           </a:prstGeom>
           <a:solidFill>
-            <a:srgbClr val="0C1022"/>
+            <a:srgbClr val="1A1E32"/>
           </a:solidFill>
           <a:ln w="12700">
             <a:solidFill>
-              <a:srgbClr val="1E293B"/>
+              <a:srgbClr val="2D384F"/>
             </a:solidFill>
           </a:ln>
         </p:spPr>
@@ -7900,11 +7900,11 @@
             <a:avLst/>
           </a:prstGeom>
           <a:solidFill>
-            <a:srgbClr val="0C1022"/>
+            <a:srgbClr val="1A1E32"/>
           </a:solidFill>
           <a:ln w="12700">
             <a:solidFill>
-              <a:srgbClr val="1E293B"/>
+              <a:srgbClr val="2D384F"/>
             </a:solidFill>
           </a:ln>
         </p:spPr>
@@ -8054,11 +8054,11 @@
             <a:avLst/>
           </a:prstGeom>
           <a:solidFill>
-            <a:srgbClr val="0C1022"/>
+            <a:srgbClr val="1A1E32"/>
           </a:solidFill>
           <a:ln w="12700">
             <a:solidFill>
-              <a:srgbClr val="1E293B"/>
+              <a:srgbClr val="2D384F"/>
             </a:solidFill>
           </a:ln>
         </p:spPr>
@@ -8208,11 +8208,11 @@
             <a:avLst/>
           </a:prstGeom>
           <a:solidFill>
-            <a:srgbClr val="0C1022"/>
+            <a:srgbClr val="1A1E32"/>
           </a:solidFill>
           <a:ln w="12700">
             <a:solidFill>
-              <a:srgbClr val="1E293B"/>
+              <a:srgbClr val="2D384F"/>
             </a:solidFill>
           </a:ln>
         </p:spPr>
@@ -8362,11 +8362,11 @@
             <a:avLst/>
           </a:prstGeom>
           <a:solidFill>
-            <a:srgbClr val="0C1022"/>
+            <a:srgbClr val="1A1E32"/>
           </a:solidFill>
           <a:ln w="12700">
             <a:solidFill>
-              <a:srgbClr val="1E293B"/>
+              <a:srgbClr val="2D384F"/>
             </a:solidFill>
           </a:ln>
         </p:spPr>
@@ -8516,11 +8516,11 @@
             <a:avLst/>
           </a:prstGeom>
           <a:solidFill>
-            <a:srgbClr val="0C1022"/>
+            <a:srgbClr val="1A1E32"/>
           </a:solidFill>
           <a:ln w="12700">
             <a:solidFill>
-              <a:srgbClr val="1E293B"/>
+              <a:srgbClr val="2D384F"/>
             </a:solidFill>
           </a:ln>
         </p:spPr>
@@ -8705,7 +8705,7 @@
     <p:bg>
       <p:bgPr>
         <a:solidFill>
-          <a:srgbClr val="06080F"/>
+          <a:srgbClr val="121524"/>
         </a:solidFill>
         <a:effectLst/>
       </p:bgPr>
@@ -8847,11 +8847,11 @@
             <a:avLst/>
           </a:prstGeom>
           <a:solidFill>
-            <a:srgbClr val="0C1022"/>
+            <a:srgbClr val="1A1E32"/>
           </a:solidFill>
           <a:ln w="12700">
             <a:solidFill>
-              <a:srgbClr val="1E293B"/>
+              <a:srgbClr val="2D384F"/>
             </a:solidFill>
           </a:ln>
         </p:spPr>
@@ -8965,11 +8965,11 @@
             <a:avLst/>
           </a:prstGeom>
           <a:solidFill>
-            <a:srgbClr val="0C1022"/>
+            <a:srgbClr val="1A1E32"/>
           </a:solidFill>
           <a:ln w="12700">
             <a:solidFill>
-              <a:srgbClr val="1E293B"/>
+              <a:srgbClr val="2D384F"/>
             </a:solidFill>
           </a:ln>
         </p:spPr>
@@ -9083,11 +9083,11 @@
             <a:avLst/>
           </a:prstGeom>
           <a:solidFill>
-            <a:srgbClr val="0C1022"/>
+            <a:srgbClr val="1A1E32"/>
           </a:solidFill>
           <a:ln w="12700">
             <a:solidFill>
-              <a:srgbClr val="1E293B"/>
+              <a:srgbClr val="2D384F"/>
             </a:solidFill>
           </a:ln>
         </p:spPr>
@@ -9236,7 +9236,7 @@
     <p:bg>
       <p:bgPr>
         <a:solidFill>
-          <a:srgbClr val="06080F"/>
+          <a:srgbClr val="121524"/>
         </a:solidFill>
         <a:effectLst/>
       </p:bgPr>
@@ -9436,11 +9436,11 @@
             <a:avLst/>
           </a:prstGeom>
           <a:solidFill>
-            <a:srgbClr val="0C1022"/>
+            <a:srgbClr val="1A1E32"/>
           </a:solidFill>
           <a:ln w="12700">
             <a:solidFill>
-              <a:srgbClr val="1E293B"/>
+              <a:srgbClr val="2D384F"/>
             </a:solidFill>
           </a:ln>
         </p:spPr>
@@ -9598,11 +9598,11 @@
             <a:avLst/>
           </a:prstGeom>
           <a:solidFill>
-            <a:srgbClr val="0C1022"/>
+            <a:srgbClr val="1A1E32"/>
           </a:solidFill>
           <a:ln w="12700">
             <a:solidFill>
-              <a:srgbClr val="1E293B"/>
+              <a:srgbClr val="2D384F"/>
             </a:solidFill>
           </a:ln>
         </p:spPr>
@@ -9760,11 +9760,11 @@
             <a:avLst/>
           </a:prstGeom>
           <a:solidFill>
-            <a:srgbClr val="0C1022"/>
+            <a:srgbClr val="1A1E32"/>
           </a:solidFill>
           <a:ln w="12700">
             <a:solidFill>
-              <a:srgbClr val="1E293B"/>
+              <a:srgbClr val="2D384F"/>
             </a:solidFill>
           </a:ln>
         </p:spPr>
@@ -9922,11 +9922,11 @@
             <a:avLst/>
           </a:prstGeom>
           <a:solidFill>
-            <a:srgbClr val="0C1022"/>
+            <a:srgbClr val="1A1E32"/>
           </a:solidFill>
           <a:ln w="12700">
             <a:solidFill>
-              <a:srgbClr val="1E293B"/>
+              <a:srgbClr val="2D384F"/>
             </a:solidFill>
           </a:ln>
         </p:spPr>
@@ -10084,11 +10084,11 @@
             <a:avLst/>
           </a:prstGeom>
           <a:solidFill>
-            <a:srgbClr val="0C1022"/>
+            <a:srgbClr val="1A1E32"/>
           </a:solidFill>
           <a:ln w="12700">
             <a:solidFill>
-              <a:srgbClr val="1E293B"/>
+              <a:srgbClr val="2D384F"/>
             </a:solidFill>
           </a:ln>
         </p:spPr>
@@ -10246,11 +10246,11 @@
             <a:avLst/>
           </a:prstGeom>
           <a:solidFill>
-            <a:srgbClr val="0C1022"/>
+            <a:srgbClr val="1A1E32"/>
           </a:solidFill>
           <a:ln w="12700">
             <a:solidFill>
-              <a:srgbClr val="1E293B"/>
+              <a:srgbClr val="2D384F"/>
             </a:solidFill>
           </a:ln>
         </p:spPr>
@@ -10408,11 +10408,11 @@
             <a:avLst/>
           </a:prstGeom>
           <a:solidFill>
-            <a:srgbClr val="0C1022"/>
+            <a:srgbClr val="1A1E32"/>
           </a:solidFill>
           <a:ln w="12700">
             <a:solidFill>
-              <a:srgbClr val="1E293B"/>
+              <a:srgbClr val="2D384F"/>
             </a:solidFill>
           </a:ln>
         </p:spPr>
@@ -10570,11 +10570,11 @@
             <a:avLst/>
           </a:prstGeom>
           <a:solidFill>
-            <a:srgbClr val="0C1022"/>
+            <a:srgbClr val="1A1E32"/>
           </a:solidFill>
           <a:ln w="12700">
             <a:solidFill>
-              <a:srgbClr val="1E293B"/>
+              <a:srgbClr val="2D384F"/>
             </a:solidFill>
           </a:ln>
         </p:spPr>
@@ -10759,7 +10759,7 @@
     <p:bg>
       <p:bgPr>
         <a:solidFill>
-          <a:srgbClr val="06080F"/>
+          <a:srgbClr val="121524"/>
         </a:solidFill>
         <a:effectLst/>
       </p:bgPr>
@@ -10960,8 +10960,8 @@
         </p:blipFill>
         <p:spPr>
           <a:xfrm>
-            <a:off x="731520" y="1691640"/>
-            <a:ext cx="10515600" cy="4754880"/>
+            <a:off x="1975104" y="1623060"/>
+            <a:ext cx="7967682" cy="4663440"/>
           </a:xfrm>
           <a:prstGeom prst="rect">
             <a:avLst/>
@@ -11054,7 +11054,7 @@
     <p:bg>
       <p:bgPr>
         <a:solidFill>
-          <a:srgbClr val="06080F"/>
+          <a:srgbClr val="121524"/>
         </a:solidFill>
         <a:effectLst/>
       </p:bgPr>
@@ -11254,11 +11254,11 @@
             <a:avLst/>
           </a:prstGeom>
           <a:solidFill>
-            <a:srgbClr val="0C1022"/>
+            <a:srgbClr val="1A1E32"/>
           </a:solidFill>
           <a:ln w="12700">
             <a:solidFill>
-              <a:srgbClr val="1E293B"/>
+              <a:srgbClr val="2D384F"/>
             </a:solidFill>
           </a:ln>
         </p:spPr>
@@ -11372,11 +11372,11 @@
             <a:avLst/>
           </a:prstGeom>
           <a:solidFill>
-            <a:srgbClr val="06080F"/>
+            <a:srgbClr val="121524"/>
           </a:solidFill>
           <a:ln w="12700">
             <a:solidFill>
-              <a:srgbClr val="1E293B"/>
+              <a:srgbClr val="2D384F"/>
             </a:solidFill>
           </a:ln>
         </p:spPr>
@@ -11490,11 +11490,11 @@
             <a:avLst/>
           </a:prstGeom>
           <a:solidFill>
-            <a:srgbClr val="0C1022"/>
+            <a:srgbClr val="1A1E32"/>
           </a:solidFill>
           <a:ln w="12700">
             <a:solidFill>
-              <a:srgbClr val="1E293B"/>
+              <a:srgbClr val="2D384F"/>
             </a:solidFill>
           </a:ln>
         </p:spPr>
@@ -11608,11 +11608,11 @@
             <a:avLst/>
           </a:prstGeom>
           <a:solidFill>
-            <a:srgbClr val="06080F"/>
+            <a:srgbClr val="121524"/>
           </a:solidFill>
           <a:ln w="12700">
             <a:solidFill>
-              <a:srgbClr val="1E293B"/>
+              <a:srgbClr val="2D384F"/>
             </a:solidFill>
           </a:ln>
         </p:spPr>
@@ -11726,11 +11726,11 @@
             <a:avLst/>
           </a:prstGeom>
           <a:solidFill>
-            <a:srgbClr val="0C1022"/>
+            <a:srgbClr val="1A1E32"/>
           </a:solidFill>
           <a:ln w="12700">
             <a:solidFill>
-              <a:srgbClr val="1E293B"/>
+              <a:srgbClr val="2D384F"/>
             </a:solidFill>
           </a:ln>
         </p:spPr>
@@ -11844,11 +11844,11 @@
             <a:avLst/>
           </a:prstGeom>
           <a:solidFill>
-            <a:srgbClr val="06080F"/>
+            <a:srgbClr val="121524"/>
           </a:solidFill>
           <a:ln w="12700">
             <a:solidFill>
-              <a:srgbClr val="1E293B"/>
+              <a:srgbClr val="2D384F"/>
             </a:solidFill>
           </a:ln>
         </p:spPr>
@@ -11966,7 +11966,7 @@
           </a:solidFill>
           <a:ln w="12700">
             <a:solidFill>
-              <a:srgbClr val="1E293B"/>
+              <a:srgbClr val="2D384F"/>
             </a:solidFill>
           </a:ln>
         </p:spPr>
@@ -12372,7 +12372,7 @@
     <p:bg>
       <p:bgPr>
         <a:solidFill>
-          <a:srgbClr val="06080F"/>
+          <a:srgbClr val="121524"/>
         </a:solidFill>
         <a:effectLst/>
       </p:bgPr>
@@ -12572,7 +12572,7 @@
             <a:avLst/>
           </a:prstGeom>
           <a:solidFill>
-            <a:srgbClr val="0C1022"/>
+            <a:srgbClr val="1A1E32"/>
           </a:solidFill>
           <a:ln w="12700">
             <a:solidFill>
@@ -12690,7 +12690,7 @@
             <a:avLst/>
           </a:prstGeom>
           <a:solidFill>
-            <a:srgbClr val="0C1022"/>
+            <a:srgbClr val="1A1E32"/>
           </a:solidFill>
           <a:ln w="12700">
             <a:solidFill>
@@ -12808,7 +12808,7 @@
             <a:avLst/>
           </a:prstGeom>
           <a:solidFill>
-            <a:srgbClr val="0C1022"/>
+            <a:srgbClr val="1A1E32"/>
           </a:solidFill>
           <a:ln w="12700">
             <a:solidFill>
@@ -13459,7 +13459,7 @@
     <p:bg>
       <p:bgPr>
         <a:solidFill>
-          <a:srgbClr val="06080F"/>
+          <a:srgbClr val="121524"/>
         </a:solidFill>
         <a:effectLst/>
       </p:bgPr>
@@ -14772,7 +14772,7 @@
     <p:bg>
       <p:bgPr>
         <a:solidFill>
-          <a:srgbClr val="06080F"/>
+          <a:srgbClr val="121524"/>
         </a:solidFill>
         <a:effectLst/>
       </p:bgPr>
@@ -15020,11 +15020,11 @@
             <a:avLst/>
           </a:prstGeom>
           <a:solidFill>
-            <a:srgbClr val="0C1022"/>
+            <a:srgbClr val="1A1E32"/>
           </a:solidFill>
           <a:ln w="12700">
             <a:solidFill>
-              <a:srgbClr val="1E293B"/>
+              <a:srgbClr val="2D384F"/>
             </a:solidFill>
           </a:ln>
         </p:spPr>
@@ -15138,11 +15138,11 @@
             <a:avLst/>
           </a:prstGeom>
           <a:solidFill>
-            <a:srgbClr val="0C1022"/>
+            <a:srgbClr val="1A1E32"/>
           </a:solidFill>
           <a:ln w="12700">
             <a:solidFill>
-              <a:srgbClr val="1E293B"/>
+              <a:srgbClr val="2D384F"/>
             </a:solidFill>
           </a:ln>
         </p:spPr>
@@ -15256,11 +15256,11 @@
             <a:avLst/>
           </a:prstGeom>
           <a:solidFill>
-            <a:srgbClr val="0C1022"/>
+            <a:srgbClr val="1A1E32"/>
           </a:solidFill>
           <a:ln w="12700">
             <a:solidFill>
-              <a:srgbClr val="1E293B"/>
+              <a:srgbClr val="2D384F"/>
             </a:solidFill>
           </a:ln>
         </p:spPr>
@@ -15374,11 +15374,11 @@
             <a:avLst/>
           </a:prstGeom>
           <a:solidFill>
-            <a:srgbClr val="0C1022"/>
+            <a:srgbClr val="1A1E32"/>
           </a:solidFill>
           <a:ln w="12700">
             <a:solidFill>
-              <a:srgbClr val="1E293B"/>
+              <a:srgbClr val="2D384F"/>
             </a:solidFill>
           </a:ln>
         </p:spPr>
@@ -15563,7 +15563,7 @@
     <p:bg>
       <p:bgPr>
         <a:solidFill>
-          <a:srgbClr val="06080F"/>
+          <a:srgbClr val="121524"/>
         </a:solidFill>
         <a:effectLst/>
       </p:bgPr>
@@ -15827,7 +15827,7 @@
           </a:solidFill>
           <a:ln w="12700">
             <a:solidFill>
-              <a:srgbClr val="1E293B"/>
+              <a:srgbClr val="2D384F"/>
             </a:solidFill>
           </a:ln>
         </p:spPr>
@@ -15977,11 +15977,11 @@
             <a:avLst/>
           </a:prstGeom>
           <a:solidFill>
-            <a:srgbClr val="0C1022"/>
+            <a:srgbClr val="1A1E32"/>
           </a:solidFill>
           <a:ln w="12700">
             <a:solidFill>
-              <a:srgbClr val="1E293B"/>
+              <a:srgbClr val="2D384F"/>
             </a:solidFill>
           </a:ln>
         </p:spPr>
@@ -16131,11 +16131,11 @@
             <a:avLst/>
           </a:prstGeom>
           <a:solidFill>
-            <a:srgbClr val="06080F"/>
+            <a:srgbClr val="121524"/>
           </a:solidFill>
           <a:ln w="12700">
             <a:solidFill>
-              <a:srgbClr val="1E293B"/>
+              <a:srgbClr val="2D384F"/>
             </a:solidFill>
           </a:ln>
         </p:spPr>
@@ -16285,11 +16285,11 @@
             <a:avLst/>
           </a:prstGeom>
           <a:solidFill>
-            <a:srgbClr val="0C1022"/>
+            <a:srgbClr val="1A1E32"/>
           </a:solidFill>
           <a:ln w="12700">
             <a:solidFill>
-              <a:srgbClr val="1E293B"/>
+              <a:srgbClr val="2D384F"/>
             </a:solidFill>
           </a:ln>
         </p:spPr>
@@ -16439,11 +16439,11 @@
             <a:avLst/>
           </a:prstGeom>
           <a:solidFill>
-            <a:srgbClr val="06080F"/>
+            <a:srgbClr val="121524"/>
           </a:solidFill>
           <a:ln w="12700">
             <a:solidFill>
-              <a:srgbClr val="1E293B"/>
+              <a:srgbClr val="2D384F"/>
             </a:solidFill>
           </a:ln>
         </p:spPr>
@@ -16664,7 +16664,7 @@
     <p:bg>
       <p:bgPr>
         <a:solidFill>
-          <a:srgbClr val="06080F"/>
+          <a:srgbClr val="121524"/>
         </a:solidFill>
         <a:effectLst/>
       </p:bgPr>
@@ -16865,8 +16865,8 @@
         </p:blipFill>
         <p:spPr>
           <a:xfrm>
-            <a:off x="1587062" y="1600200"/>
-            <a:ext cx="8891752" cy="5074920"/>
+            <a:off x="1629103" y="1600200"/>
+            <a:ext cx="8975836" cy="4709160"/>
           </a:xfrm>
           <a:prstGeom prst="rect">
             <a:avLst/>
